--- a/docs/Slide16_stability_window.pptx
+++ b/docs/Slide16_stability_window.pptx
@@ -1901,8 +1901,8 @@
         </p:blipFill>
         <p:spPr>
           <a:xfrm>
-            <a:off x="1378772" y="2231136"/>
-            <a:ext cx="6386454" cy="2999232"/>
+            <a:off x="1665146" y="2231136"/>
+            <a:ext cx="5813706" cy="2999232"/>
           </a:xfrm>
           <a:prstGeom prst="rect">
             <a:avLst/>

--- a/docs/Slide16_stability_window.pptx
+++ b/docs/Slide16_stability_window.pptx
@@ -1901,8 +1901,8 @@
         </p:blipFill>
         <p:spPr>
           <a:xfrm>
-            <a:off x="1665146" y="2231136"/>
-            <a:ext cx="5813706" cy="2999232"/>
+            <a:off x="1092398" y="2231136"/>
+            <a:ext cx="6959203" cy="2999232"/>
           </a:xfrm>
           <a:prstGeom prst="rect">
             <a:avLst/>
